--- a/print/Regeln.pptx
+++ b/print/Regeln.pptx
@@ -105,6 +105,11 @@
       </a:defRPr>
     </a:lvl9pPr>
   </p:defaultTextStyle>
+  <p:extLst>
+    <p:ext uri="{EFAFB233-063F-42B5-8137-9DF3F51BA10A}">
+      <p15:sldGuideLst xmlns:p15="http://schemas.microsoft.com/office/powerpoint/2012/main"/>
+    </p:ext>
+  </p:extLst>
 </p:presentation>
 </file>
 
@@ -2984,7 +2989,7 @@
         <p:spPr>
           <a:xfrm>
             <a:off x="171450" y="247650"/>
-            <a:ext cx="6457950" cy="8833187"/>
+            <a:ext cx="6457950" cy="10187404"/>
           </a:xfrm>
           <a:prstGeom prst="rect">
             <a:avLst/>
@@ -3005,25 +3010,27 @@
           <a:p>
             <a:r>
               <a:rPr lang="de-DE" sz="1100" dirty="0"/>
-              <a:t>X Hauspläne</a:t>
-            </a:r>
-          </a:p>
-          <a:p>
-            <a:r>
-              <a:rPr lang="de-DE" sz="1100" dirty="0"/>
-              <a:t>X Wertungsbögen</a:t>
-            </a:r>
-          </a:p>
-          <a:p>
-            <a:r>
-              <a:rPr lang="de-DE" sz="1100" dirty="0"/>
-              <a:t>X Maßnahmenkarten</a:t>
-            </a:r>
-          </a:p>
-          <a:p>
-            <a:r>
-              <a:rPr lang="de-DE" sz="1100" dirty="0"/>
-              <a:t>X Trackingmarker</a:t>
+              <a:t>1 Hausplan			Version A: Zettel und Stift	VersionB:	11 Trackingmarker</a:t>
+            </a:r>
+          </a:p>
+          <a:p>
+            <a:r>
+              <a:rPr lang="de-DE" sz="1100" dirty="0"/>
+              <a:t>1 Wertungsbogen		Wertungstabelle - Vordruck			X Budget-Marker (genauer!)</a:t>
+            </a:r>
+          </a:p>
+          <a:p>
+            <a:r>
+              <a:rPr lang="de-DE" sz="1100" dirty="0"/>
+              <a:t>56 Maßnahmenkarten								X CO</a:t>
+            </a:r>
+            <a:r>
+              <a:rPr lang="de-DE" sz="1100" baseline="-25000" dirty="0"/>
+              <a:t>2</a:t>
+            </a:r>
+            <a:r>
+              <a:rPr lang="de-DE" sz="1100" dirty="0"/>
+              <a:t>-Marker (genauer!)</a:t>
             </a:r>
           </a:p>
           <a:p>
@@ -3038,7 +3045,7 @@
           <a:p>
             <a:r>
               <a:rPr lang="de-DE" sz="1100" dirty="0"/>
-              <a:t>In „Klimafitte Stadtsanierung“ renovieren die Spieler:innen allein oder in Gruppen ein Haus, indem sie verschiedene Sanierungsmaßnahmen setzen. In vier Runden setzen die Spieler:innen ihr Budget ein, um </a:t>
+              <a:t>In „Klimafitte Stadtsanierung“ wird ein Haus renoviert, indem verschiedene Sanierungsmaßnahmen gesetzt werden. Dabei arbeiten alle Mitspielenden gemeinsam am gleichen Sanierungsprojekt. In vier Runden setzen die Spieler:innen ihr Budget ein, um </a:t>
             </a:r>
             <a:r>
               <a:rPr lang="de-DE" sz="1100" b="1" dirty="0"/>
@@ -3046,15 +3053,7 @@
             </a:r>
             <a:r>
               <a:rPr lang="de-DE" sz="1100" dirty="0"/>
-              <a:t> zu kaufen und so die Werte </a:t>
-            </a:r>
-            <a:r>
-              <a:rPr lang="de-DE" sz="1100" i="1" dirty="0"/>
-              <a:t>(Kennzahlen?)</a:t>
-            </a:r>
-            <a:r>
-              <a:rPr lang="de-DE" sz="1100" dirty="0"/>
-              <a:t> ihres Hauses zu verbessern. Jede </a:t>
+              <a:t> zu kaufen und so die Gebäudeeigenschaften ihres Hauses zu verbessern. Jede </a:t>
             </a:r>
             <a:r>
               <a:rPr lang="de-DE" sz="1100" b="1" dirty="0"/>
@@ -3062,7 +3061,7 @@
             </a:r>
             <a:r>
               <a:rPr lang="de-DE" sz="1100" dirty="0"/>
-              <a:t> stellt dabei eine Maßnahme zur Sanierung des Hauses dar. Zum Ende jeder Runde findet eine Wertungsphase statt, in der aus den Werten/Kennzahlen des Hauses </a:t>
+              <a:t> stellt dabei eine Maßnahme zur Sanierung des Hauses dar. Zum Ende jeder Runde findet eine Wertungsphase statt, in der aus den Gebäudeeigenschaften des Hauses </a:t>
             </a:r>
             <a:r>
               <a:rPr lang="de-DE" sz="1100" b="1" i="1" dirty="0"/>
@@ -3144,7 +3143,7 @@
             </a:pPr>
             <a:r>
               <a:rPr lang="de-DE" sz="1100" dirty="0"/>
-              <a:t>Jede Spieler:in legt die beiden Spielerbögen (</a:t>
+              <a:t>Die beiden Spielbögen (</a:t>
             </a:r>
             <a:r>
               <a:rPr lang="de-DE" sz="1100" b="1" dirty="0"/>
@@ -3160,7 +3159,7 @@
             </a:r>
             <a:r>
               <a:rPr lang="de-DE" sz="1100" dirty="0"/>
-              <a:t>) gut erreichbar bereit</a:t>
+              <a:t>) werden gut erreichbar bereit gelegt</a:t>
             </a:r>
           </a:p>
           <a:p>
@@ -3169,7 +3168,7 @@
             </a:pPr>
             <a:r>
               <a:rPr lang="de-DE" sz="1100" dirty="0"/>
-              <a:t>Jede Spieler:in erhält elf </a:t>
+              <a:t>Zehn der elf </a:t>
             </a:r>
             <a:r>
               <a:rPr lang="de-DE" sz="1100" b="1" dirty="0"/>
@@ -3177,11 +3176,15 @@
             </a:r>
             <a:r>
               <a:rPr lang="de-DE" sz="1100" dirty="0"/>
-              <a:t> und platziert sie auf den markierten Startfeldern im </a:t>
+              <a:t> werden auf den markierten Startfeldern im </a:t>
             </a:r>
             <a:r>
               <a:rPr lang="de-DE" sz="1100" b="1" dirty="0"/>
               <a:t>Wertungsbogen</a:t>
+            </a:r>
+            <a:r>
+              <a:rPr lang="de-DE" sz="1100" dirty="0"/>
+              <a:t> platziert</a:t>
             </a:r>
           </a:p>
           <a:p>
@@ -3190,15 +3193,40 @@
             </a:pPr>
             <a:r>
               <a:rPr lang="de-DE" sz="1100" dirty="0"/>
-              <a:t>Jede Spieler:in erhält drei </a:t>
+              <a:t>Der elfte </a:t>
+            </a:r>
+            <a:r>
+              <a:rPr lang="de-DE" sz="1100" b="1" dirty="0"/>
+              <a:t>Trackingmarker </a:t>
+            </a:r>
+            <a:r>
+              <a:rPr lang="de-DE" sz="1100" dirty="0"/>
+              <a:t>wird erst bei Installation einer </a:t>
+            </a:r>
+            <a:r>
+              <a:rPr lang="de-DE" sz="1100" i="1" dirty="0"/>
+              <a:t>Wärmepumpe</a:t>
+            </a:r>
+            <a:r>
+              <a:rPr lang="de-DE" sz="1100" dirty="0"/>
+              <a:t> benötigt und wird erstmal zur Seite gelegt</a:t>
+            </a:r>
+          </a:p>
+          <a:p>
+            <a:pPr marL="228600" indent="-228600">
+              <a:buAutoNum type="arabicPeriod"/>
+            </a:pPr>
+            <a:r>
+              <a:rPr lang="de-DE" sz="1100" dirty="0"/>
+              <a:t>Die Spieler:innen starten mit drei </a:t>
             </a:r>
             <a:r>
               <a:rPr lang="de-DE" sz="1100" b="1" i="1" dirty="0"/>
-              <a:t>Budgeteinheiten</a:t>
-            </a:r>
-            <a:r>
-              <a:rPr lang="de-DE" sz="1100" dirty="0"/>
-              <a:t> aus dem Vorrat</a:t>
+              <a:t>Budget</a:t>
+            </a:r>
+            <a:r>
+              <a:rPr lang="de-DE" sz="1100" dirty="0"/>
+              <a:t>-Einheiten aus dem Vorrat</a:t>
             </a:r>
           </a:p>
           <a:p>
@@ -3208,15 +3236,7 @@
             </a:pPr>
             <a:r>
               <a:rPr lang="de-DE" sz="1100" dirty="0"/>
-              <a:t>Die </a:t>
-            </a:r>
-            <a:r>
-              <a:rPr lang="de-DE" sz="1100" b="1" dirty="0"/>
-              <a:t>Maßnahmenkarten</a:t>
-            </a:r>
-            <a:r>
-              <a:rPr lang="de-DE" sz="1100" dirty="0"/>
-              <a:t> werden nach ihrer Kategorie (an der Rückseite erkennbar) sortiert, gemischt und bereit gelegt</a:t>
+              <a:t>Es wird einer der folgenden Spielmodi gewählt: Kreativ, Kooperativ, Experte</a:t>
             </a:r>
           </a:p>
           <a:p>
@@ -3226,8 +3246,37 @@
             </a:pPr>
             <a:r>
               <a:rPr lang="de-DE" sz="1100" dirty="0"/>
-              <a:t>Es wird per Zufall ein Startspieler bestimmt.</a:t>
-            </a:r>
+              <a:t>Abhängig vom Spielmodus werden die </a:t>
+            </a:r>
+            <a:r>
+              <a:rPr lang="de-DE" sz="1100" b="1" dirty="0"/>
+              <a:t>Maßnahmenkarten</a:t>
+            </a:r>
+            <a:r>
+              <a:rPr lang="de-DE" sz="1100" dirty="0"/>
+              <a:t> vorbereitet:</a:t>
+            </a:r>
+          </a:p>
+          <a:p>
+            <a:endParaRPr lang="de-DE" sz="1100" dirty="0"/>
+          </a:p>
+          <a:p>
+            <a:endParaRPr lang="de-DE" sz="1100" dirty="0"/>
+          </a:p>
+          <a:p>
+            <a:endParaRPr lang="de-DE" sz="1100" dirty="0"/>
+          </a:p>
+          <a:p>
+            <a:endParaRPr lang="de-DE" sz="1100" dirty="0"/>
+          </a:p>
+          <a:p>
+            <a:endParaRPr lang="de-DE" sz="1100" dirty="0"/>
+          </a:p>
+          <a:p>
+            <a:endParaRPr lang="de-DE" sz="1100" dirty="0"/>
+          </a:p>
+          <a:p>
+            <a:endParaRPr lang="de-DE" sz="1100" dirty="0"/>
           </a:p>
           <a:p>
             <a:endParaRPr lang="de-DE" sz="1100" dirty="0"/>
@@ -3268,9 +3317,7 @@
               <a:rPr lang="de-DE" sz="1100" dirty="0"/>
               <a:t>Wertungsphase</a:t>
             </a:r>
-          </a:p>
-          <a:p>
-            <a:endParaRPr lang="de-DE" sz="1100" dirty="0"/>
+            <a:endParaRPr lang="de-DE" sz="1400" dirty="0"/>
           </a:p>
           <a:p>
             <a:endParaRPr lang="de-DE" sz="1400" dirty="0"/>
@@ -3284,39 +3331,81 @@
           <a:p>
             <a:r>
               <a:rPr lang="de-DE" sz="1100" dirty="0"/>
-              <a:t>In der Renovierungsphase sind die Spieler:innen abwechselnd im Uhrzeigersinn am Zug. Wer am Zug ist wählt eine </a:t>
+              <a:t>In der Renovierungsphase werden Maßnahmen gesetzt, um die Gebäudeeigenschaften zu verbessern. Über mehrere Züge werden </a:t>
             </a:r>
             <a:r>
               <a:rPr lang="de-DE" sz="1100" b="1" dirty="0"/>
-              <a:t>Maßnahmenkarte</a:t>
-            </a:r>
-            <a:r>
-              <a:rPr lang="de-DE" sz="1100" dirty="0"/>
-              <a:t> aus und installiert diese. Das läuft immer in den folgenden Schritten ab:</a:t>
-            </a:r>
-          </a:p>
-          <a:p>
-            <a:r>
-              <a:rPr lang="de-DE" sz="1100" dirty="0"/>
-              <a:t>	Auswahl – **********</a:t>
-            </a:r>
-          </a:p>
-          <a:p>
-            <a:r>
-              <a:rPr lang="de-DE" sz="1100" dirty="0"/>
-              <a:t>	Bedingungen prüfen – Manche Karten haben Bedingungen. Eine Karte kann nur gespielt werden, 	wenn die Bedingungen erfült sind. Außerdem darf je nach Kategorie uU nur eine Karte installiert 	werden. Um von einer solchen Kategorie eine Karte zu installieren, darf noch keine andere Karte 	dieser Kategorie installiert sein.</a:t>
-            </a:r>
-          </a:p>
-          <a:p>
-            <a:r>
-              <a:rPr lang="de-DE" sz="1100" dirty="0"/>
-              <a:t>	Kosten bezahlen – Die auf der Karte angegebenen Kosten werden in den Vorrat bezahlt.</a:t>
-            </a:r>
-          </a:p>
-          <a:p>
-            <a:r>
-              <a:rPr lang="de-DE" sz="1100" dirty="0"/>
-              <a:t>	Sofortemissionen abtragen – Manche Karten haben Sofortemissionen, also </a:t>
+              <a:t>Maßnahmenkarten</a:t>
+            </a:r>
+            <a:r>
+              <a:rPr lang="de-DE" sz="1100" dirty="0"/>
+              <a:t> ausgewählt und installiert. Je nach Spielmodus läuft die Auswahl der </a:t>
+            </a:r>
+            <a:r>
+              <a:rPr lang="de-DE" sz="1100" b="1" dirty="0"/>
+              <a:t>Maßnahmenkarten </a:t>
+            </a:r>
+            <a:r>
+              <a:rPr lang="de-DE" sz="1100" dirty="0"/>
+              <a:t>unterschiedlich ab. Die Installation einer </a:t>
+            </a:r>
+            <a:r>
+              <a:rPr lang="de-DE" sz="1100" b="1" dirty="0"/>
+              <a:t>Maßnahmenkarte </a:t>
+            </a:r>
+            <a:r>
+              <a:rPr lang="de-DE" sz="1100" dirty="0"/>
+              <a:t>ist allerdings immer gleich:</a:t>
+            </a:r>
+          </a:p>
+          <a:p>
+            <a:r>
+              <a:rPr lang="de-DE" sz="1100" dirty="0"/>
+              <a:t>	</a:t>
+            </a:r>
+            <a:r>
+              <a:rPr lang="de-DE" sz="1100" u="sng" dirty="0"/>
+              <a:t>Bedingungen prüfen</a:t>
+            </a:r>
+            <a:r>
+              <a:rPr lang="de-DE" sz="1100" dirty="0"/>
+              <a:t> – Manche Karten haben Bedingungen. Eine Karte kann nur gespielt werden, 	wenn die Bedingungen erfült sind. Außerdem darf je nach Kategorie uU nur eine Karte installiert 	werden. Um von einer solchen Kategorie eine Karte zu installieren, darf noch keine andere Karte 	dieser Kategorie installiert sein. Diese Kategorien sind aus dem </a:t>
+            </a:r>
+            <a:r>
+              <a:rPr lang="de-DE" sz="1100" b="1" dirty="0"/>
+              <a:t>Hausplan </a:t>
+            </a:r>
+            <a:r>
+              <a:rPr lang="de-DE" sz="1100" dirty="0"/>
+              <a:t>ersichtlich.</a:t>
+            </a:r>
+          </a:p>
+          <a:p>
+            <a:r>
+              <a:rPr lang="de-DE" sz="1100" dirty="0"/>
+              <a:t>	</a:t>
+            </a:r>
+            <a:r>
+              <a:rPr lang="de-DE" sz="1100" u="sng" dirty="0"/>
+              <a:t>Kosten bezahlen</a:t>
+            </a:r>
+            <a:r>
+              <a:rPr lang="de-DE" sz="1100" dirty="0"/>
+              <a:t> – Die auf der Karte angegebenen Kosten werden in den Vorrat bezahlt. Können 	die Kosten nicht bezahlt werden, darf die Karte nicht installiert werden.</a:t>
+            </a:r>
+          </a:p>
+          <a:p>
+            <a:r>
+              <a:rPr lang="de-DE" sz="1100" dirty="0"/>
+              <a:t>	</a:t>
+            </a:r>
+            <a:r>
+              <a:rPr lang="de-DE" sz="1100" u="sng" dirty="0"/>
+              <a:t>Sofortemissionen abtragen</a:t>
+            </a:r>
+            <a:r>
+              <a:rPr lang="de-DE" sz="1100" dirty="0"/>
+              <a:t> – Manche Karten haben Sofortemissionen, also </a:t>
             </a:r>
             <a:r>
               <a:rPr lang="de-DE" sz="1100" b="1" i="1" dirty="0"/>
@@ -3332,37 +3421,21 @@
             </a:r>
             <a:r>
               <a:rPr lang="de-DE" sz="1100" dirty="0"/>
-              <a:t>, die 	bei der Installation auf der Punkteleiste abgetragen werden. Diese werden jetzt abgetragen.</a:t>
-            </a:r>
-          </a:p>
-          <a:p>
-            <a:r>
-              <a:rPr lang="de-DE" sz="1100" dirty="0"/>
-              <a:t>	Werte/Kennzahlen aktualisieren – Die Symbole auf der Karte werden auf dem Wertungsbogen 	abgetragen. Dabei wird die passende Trackingleiste zu jedem Symbol gesucht und</a:t>
-            </a:r>
-          </a:p>
-          <a:p>
-            <a:r>
-              <a:rPr lang="de-DE" sz="1100" dirty="0"/>
-              <a:t>	der Trackingmarker entsprechend der Zahl verschoben. Dabei bedeutet </a:t>
-            </a:r>
-          </a:p>
-          <a:p>
-            <a:r>
-              <a:rPr lang="de-DE" sz="1100" dirty="0"/>
-              <a:t>	eine positive Zahl das Verschieben des Markers nach oben</a:t>
-            </a:r>
-          </a:p>
-          <a:p>
-            <a:r>
-              <a:rPr lang="de-DE" sz="1100" dirty="0"/>
-              <a:t>	und eine negative Zahl das Verschieben des Markers nach</a:t>
-            </a:r>
-          </a:p>
-          <a:p>
-            <a:r>
-              <a:rPr lang="de-DE" sz="1100" dirty="0"/>
-              <a:t>	unten.</a:t>
+              <a:t>, die 	bei der Installation entstehen. Diese werden jetzt in der Wertungstabelle bei der aktuellen Runde 	eingetragen.</a:t>
+            </a:r>
+          </a:p>
+          <a:p>
+            <a:r>
+              <a:rPr lang="de-DE" sz="1100" dirty="0"/>
+              <a:t>	</a:t>
+            </a:r>
+            <a:r>
+              <a:rPr lang="de-DE" sz="1100" u="sng" dirty="0"/>
+              <a:t>Gebäudeeigenschaften aktualisieren</a:t>
+            </a:r>
+            <a:r>
+              <a:rPr lang="de-DE" sz="1100" dirty="0"/>
+              <a:t> – Die Symbole auf der Karte werden auf dem 	Wertungsbogen abgetragen. Dabei wird die passende Trackingleiste zu jedem Symbol gesucht 	und der Trackingmarker entsprechend der Zahl verschoben. Dabei bedeutet 	eine positive Zahl 	das Verschieben des Markers nach oben und eine negative Zahl das Verschieben des Markers 	nach unten.</a:t>
             </a:r>
           </a:p>
         </p:txBody>
@@ -3381,8 +3454,8 @@
         </p:nvSpPr>
         <p:spPr>
           <a:xfrm>
-            <a:off x="3060834" y="4558336"/>
-            <a:ext cx="3500588" cy="1354217"/>
+            <a:off x="6629400" y="4242910"/>
+            <a:ext cx="4333842" cy="2739211"/>
           </a:xfrm>
           <a:prstGeom prst="rect">
             <a:avLst/>
@@ -3440,7 +3513,7 @@
             </a:r>
             <a:r>
               <a:rPr lang="de-DE" sz="900" dirty="0"/>
-              <a:t>. Manche können kostenfrei installiert werden, wenn die Kosten im Vergleich zu anderen Maßnahmen vernachlässigbar sind. Einige </a:t>
+              <a:t>. Manche können kostenfrei installiert werden. Einige </a:t>
             </a:r>
             <a:r>
               <a:rPr lang="de-DE" sz="900" b="1" dirty="0"/>
@@ -3449,6 +3522,168 @@
             <a:r>
               <a:rPr lang="de-DE" sz="900" dirty="0"/>
               <a:t> haben Bedingungen, die für ihre Installation erfüllt sein müssen.</a:t>
+            </a:r>
+          </a:p>
+          <a:p>
+            <a:r>
+              <a:rPr lang="de-DE" sz="900" dirty="0"/>
+              <a:t>Es gibt vier Bedingungstypen. </a:t>
+            </a:r>
+          </a:p>
+          <a:p>
+            <a:pPr marL="171450" indent="-171450">
+              <a:buFontTx/>
+              <a:buChar char="-"/>
+            </a:pPr>
+            <a:r>
+              <a:rPr lang="de-DE" sz="900" dirty="0"/>
+              <a:t>Alle Maßnahmen aus der Kategorie </a:t>
+            </a:r>
+            <a:r>
+              <a:rPr lang="de-DE" sz="900" i="1" dirty="0"/>
+              <a:t>Wärmeabgabe</a:t>
+            </a:r>
+            <a:r>
+              <a:rPr lang="de-DE" sz="900" dirty="0"/>
+              <a:t> haben eine </a:t>
+            </a:r>
+            <a:r>
+              <a:rPr lang="de-DE" sz="900" b="1" i="1" dirty="0"/>
+              <a:t>Wärmeschutz</a:t>
+            </a:r>
+            <a:r>
+              <a:rPr lang="de-DE" sz="900" dirty="0"/>
+              <a:t>-Voraussetzung, d.h. die Gebäudeeigenschaft Wärmeschutz muss mindestens diesen Wert erreicht haben.</a:t>
+            </a:r>
+          </a:p>
+          <a:p>
+            <a:pPr marL="171450" indent="-171450">
+              <a:buFontTx/>
+              <a:buChar char="-"/>
+            </a:pPr>
+            <a:r>
+              <a:rPr lang="de-DE" sz="900" dirty="0"/>
+              <a:t>Einige Maßnahmen benötigen eine </a:t>
+            </a:r>
+            <a:r>
+              <a:rPr lang="de-DE" sz="900" i="1" dirty="0"/>
+              <a:t>Wärmepumpe</a:t>
+            </a:r>
+            <a:r>
+              <a:rPr lang="de-DE" sz="900" dirty="0"/>
+              <a:t> (zB </a:t>
+            </a:r>
+            <a:r>
+              <a:rPr lang="de-DE" sz="900" i="1" dirty="0"/>
+              <a:t>Thermische Flexibilität </a:t>
+            </a:r>
+            <a:r>
+              <a:rPr lang="de-DE" sz="900" dirty="0"/>
+              <a:t>aus der Kategorie </a:t>
+            </a:r>
+            <a:r>
+              <a:rPr lang="de-DE" sz="900" i="1" dirty="0"/>
+              <a:t>Flexibilität</a:t>
+            </a:r>
+            <a:r>
+              <a:rPr lang="de-DE" sz="900" dirty="0"/>
+              <a:t>). Um diese Karten zu installieren muss vorher eine </a:t>
+            </a:r>
+            <a:r>
+              <a:rPr lang="de-DE" sz="900" i="1" dirty="0"/>
+              <a:t>Wärmepumpe </a:t>
+            </a:r>
+            <a:r>
+              <a:rPr lang="de-DE" sz="900" dirty="0"/>
+              <a:t>aus der Kategorie </a:t>
+            </a:r>
+            <a:r>
+              <a:rPr lang="de-DE" sz="900" i="1" dirty="0"/>
+              <a:t>Wärmeerzeugung</a:t>
+            </a:r>
+            <a:r>
+              <a:rPr lang="de-DE" sz="900" dirty="0"/>
+              <a:t> installiert werden.</a:t>
+            </a:r>
+          </a:p>
+          <a:p>
+            <a:pPr marL="171450" indent="-171450">
+              <a:buFontTx/>
+              <a:buChar char="-"/>
+            </a:pPr>
+            <a:r>
+              <a:rPr lang="de-DE" sz="900" dirty="0"/>
+              <a:t>Macnhe Maßnahmen sind direkt von anderen Maßnahmen abhängig, zB hat die Maßnahme </a:t>
+            </a:r>
+            <a:r>
+              <a:rPr lang="de-DE" sz="900" i="1" dirty="0"/>
+              <a:t>Bi-direktionales Laden </a:t>
+            </a:r>
+            <a:r>
+              <a:rPr lang="de-DE" sz="900" dirty="0"/>
+              <a:t>aus der Kategorie </a:t>
+            </a:r>
+            <a:r>
+              <a:rPr lang="de-DE" sz="900" i="1" dirty="0"/>
+              <a:t>Flexibilität </a:t>
+            </a:r>
+            <a:r>
+              <a:rPr lang="de-DE" sz="900" dirty="0"/>
+              <a:t>die Voraussetzung, dass entweder </a:t>
+            </a:r>
+            <a:r>
+              <a:rPr lang="de-DE" sz="900" i="1" dirty="0"/>
+              <a:t>Private Wallboxen</a:t>
+            </a:r>
+            <a:r>
+              <a:rPr lang="de-DE" sz="900" dirty="0"/>
+              <a:t> oder </a:t>
+            </a:r>
+            <a:r>
+              <a:rPr lang="de-DE" sz="900" i="1" dirty="0"/>
+              <a:t>Hausweiter E-Car Port</a:t>
+            </a:r>
+            <a:r>
+              <a:rPr lang="de-DE" sz="900" dirty="0"/>
+              <a:t> aus der Kategorie </a:t>
+            </a:r>
+            <a:r>
+              <a:rPr lang="de-DE" sz="900" i="1" dirty="0"/>
+              <a:t>Nutzungsqualität</a:t>
+            </a:r>
+            <a:r>
+              <a:rPr lang="de-DE" sz="900" dirty="0"/>
+              <a:t> installiert ist</a:t>
+            </a:r>
+          </a:p>
+          <a:p>
+            <a:pPr marL="171450" indent="-171450">
+              <a:buFontTx/>
+              <a:buChar char="-"/>
+            </a:pPr>
+            <a:r>
+              <a:rPr lang="de-DE" sz="900" dirty="0"/>
+              <a:t>Manche Maßnahmen schließen sich gegenseitig aus, zB die Maßnahmen </a:t>
+            </a:r>
+            <a:r>
+              <a:rPr lang="de-DE" sz="900" i="1" dirty="0"/>
+              <a:t>Großer Batteriespeicher</a:t>
+            </a:r>
+            <a:r>
+              <a:rPr lang="de-DE" sz="900" dirty="0"/>
+              <a:t> und </a:t>
+            </a:r>
+            <a:r>
+              <a:rPr lang="de-DE" sz="900" i="1" dirty="0"/>
+              <a:t>Kleiner Heimspeicher </a:t>
+            </a:r>
+            <a:r>
+              <a:rPr lang="de-DE" sz="900" dirty="0"/>
+              <a:t>aus der Kategorie </a:t>
+            </a:r>
+            <a:r>
+              <a:rPr lang="de-DE" sz="900" i="1" dirty="0"/>
+              <a:t>Flexibilität</a:t>
             </a:r>
           </a:p>
         </p:txBody>
@@ -3481,7 +3716,7 @@
         </p:blipFill>
         <p:spPr>
           <a:xfrm>
-            <a:off x="4445975" y="8173350"/>
+            <a:off x="8353831" y="7451455"/>
             <a:ext cx="2240575" cy="1485000"/>
           </a:xfrm>
           <a:prstGeom prst="rect">
@@ -3511,7 +3746,7 @@
         </p:blipFill>
         <p:spPr>
           <a:xfrm>
-            <a:off x="5257799" y="8573006"/>
+            <a:off x="7192477" y="8043617"/>
             <a:ext cx="807175" cy="1127339"/>
           </a:xfrm>
           <a:prstGeom prst="rect">
@@ -3519,6 +3754,824 @@
           </a:prstGeom>
         </p:spPr>
       </p:pic>
+      <p:graphicFrame>
+        <p:nvGraphicFramePr>
+          <p:cNvPr id="2" name="Table 1">
+            <a:extLst>
+              <a:ext uri="{FF2B5EF4-FFF2-40B4-BE49-F238E27FC236}">
+                <a16:creationId xmlns:a16="http://schemas.microsoft.com/office/drawing/2014/main" id="{59E9A484-568D-CA8B-F223-98A6D6D9A2F7}"/>
+              </a:ext>
+            </a:extLst>
+          </p:cNvPr>
+          <p:cNvGraphicFramePr>
+            <a:graphicFrameLocks noGrp="1"/>
+          </p:cNvGraphicFramePr>
+          <p:nvPr>
+            <p:extLst>
+              <p:ext uri="{D42A27DB-BD31-4B8C-83A1-F6EECF244321}">
+                <p14:modId xmlns:p14="http://schemas.microsoft.com/office/powerpoint/2010/main" val="763873544"/>
+              </p:ext>
+            </p:extLst>
+          </p:nvPr>
+        </p:nvGraphicFramePr>
+        <p:xfrm>
+          <a:off x="717684" y="4338961"/>
+          <a:ext cx="5143366" cy="1112520"/>
+        </p:xfrm>
+        <a:graphic>
+          <a:graphicData uri="http://schemas.openxmlformats.org/drawingml/2006/table">
+            <a:tbl>
+              <a:tblPr>
+                <a:tableStyleId>{5C22544A-7EE6-4342-B048-85BDC9FD1C3A}</a:tableStyleId>
+              </a:tblPr>
+              <a:tblGrid>
+                <a:gridCol w="965066">
+                  <a:extLst>
+                    <a:ext uri="{9D8B030D-6E8A-4147-A177-3AD203B41FA5}">
+                      <a16:colId xmlns:a16="http://schemas.microsoft.com/office/drawing/2014/main" val="605022111"/>
+                    </a:ext>
+                  </a:extLst>
+                </a:gridCol>
+                <a:gridCol w="4178300">
+                  <a:extLst>
+                    <a:ext uri="{9D8B030D-6E8A-4147-A177-3AD203B41FA5}">
+                      <a16:colId xmlns:a16="http://schemas.microsoft.com/office/drawing/2014/main" val="3735776512"/>
+                    </a:ext>
+                  </a:extLst>
+                </a:gridCol>
+              </a:tblGrid>
+              <a:tr h="0">
+                <a:tc>
+                  <a:txBody>
+                    <a:bodyPr/>
+                    <a:lstStyle/>
+                    <a:p>
+                      <a:r>
+                        <a:rPr lang="de-DE" sz="1100" dirty="0"/>
+                        <a:t>Kreativ</a:t>
+                      </a:r>
+                    </a:p>
+                  </a:txBody>
+                  <a:tcPr>
+                    <a:lnL w="12700" cap="flat" cmpd="sng" algn="ctr">
+                      <a:solidFill>
+                        <a:schemeClr val="tx1"/>
+                      </a:solidFill>
+                      <a:prstDash val="solid"/>
+                      <a:round/>
+                      <a:headEnd type="none" w="med" len="med"/>
+                      <a:tailEnd type="none" w="med" len="med"/>
+                    </a:lnL>
+                    <a:lnR w="12700" cap="flat" cmpd="sng" algn="ctr">
+                      <a:solidFill>
+                        <a:schemeClr val="tx1"/>
+                      </a:solidFill>
+                      <a:prstDash val="solid"/>
+                      <a:round/>
+                      <a:headEnd type="none" w="med" len="med"/>
+                      <a:tailEnd type="none" w="med" len="med"/>
+                    </a:lnR>
+                    <a:lnT w="12700" cap="flat" cmpd="sng" algn="ctr">
+                      <a:solidFill>
+                        <a:schemeClr val="tx1"/>
+                      </a:solidFill>
+                      <a:prstDash val="solid"/>
+                      <a:round/>
+                      <a:headEnd type="none" w="med" len="med"/>
+                      <a:tailEnd type="none" w="med" len="med"/>
+                    </a:lnT>
+                    <a:lnB w="12700" cap="flat" cmpd="sng" algn="ctr">
+                      <a:solidFill>
+                        <a:schemeClr val="tx1"/>
+                      </a:solidFill>
+                      <a:prstDash val="solid"/>
+                      <a:round/>
+                      <a:headEnd type="none" w="med" len="med"/>
+                      <a:tailEnd type="none" w="med" len="med"/>
+                    </a:lnB>
+                    <a:solidFill>
+                      <a:schemeClr val="bg1"/>
+                    </a:solidFill>
+                  </a:tcPr>
+                </a:tc>
+                <a:tc>
+                  <a:txBody>
+                    <a:bodyPr/>
+                    <a:lstStyle/>
+                    <a:p>
+                      <a:r>
+                        <a:rPr lang="de-DE" sz="1100" dirty="0"/>
+                        <a:t>Lege alle </a:t>
+                      </a:r>
+                      <a:r>
+                        <a:rPr lang="de-DE" sz="1100" b="1" i="0" dirty="0"/>
+                        <a:t>Maßnahmenkarten </a:t>
+                      </a:r>
+                      <a:r>
+                        <a:rPr lang="de-DE" sz="1100" dirty="0"/>
+                        <a:t>nach ihren Kategorien sortiert gut erreichbar bereit</a:t>
+                      </a:r>
+                    </a:p>
+                  </a:txBody>
+                  <a:tcPr>
+                    <a:lnL w="12700" cap="flat" cmpd="sng" algn="ctr">
+                      <a:solidFill>
+                        <a:schemeClr val="tx1"/>
+                      </a:solidFill>
+                      <a:prstDash val="solid"/>
+                      <a:round/>
+                      <a:headEnd type="none" w="med" len="med"/>
+                      <a:tailEnd type="none" w="med" len="med"/>
+                    </a:lnL>
+                    <a:lnR w="12700" cap="flat" cmpd="sng" algn="ctr">
+                      <a:solidFill>
+                        <a:schemeClr val="tx1"/>
+                      </a:solidFill>
+                      <a:prstDash val="solid"/>
+                      <a:round/>
+                      <a:headEnd type="none" w="med" len="med"/>
+                      <a:tailEnd type="none" w="med" len="med"/>
+                    </a:lnR>
+                    <a:lnT w="12700" cap="flat" cmpd="sng" algn="ctr">
+                      <a:solidFill>
+                        <a:schemeClr val="tx1"/>
+                      </a:solidFill>
+                      <a:prstDash val="solid"/>
+                      <a:round/>
+                      <a:headEnd type="none" w="med" len="med"/>
+                      <a:tailEnd type="none" w="med" len="med"/>
+                    </a:lnT>
+                    <a:lnB w="12700" cap="flat" cmpd="sng" algn="ctr">
+                      <a:solidFill>
+                        <a:schemeClr val="tx1"/>
+                      </a:solidFill>
+                      <a:prstDash val="solid"/>
+                      <a:round/>
+                      <a:headEnd type="none" w="med" len="med"/>
+                      <a:tailEnd type="none" w="med" len="med"/>
+                    </a:lnB>
+                    <a:solidFill>
+                      <a:schemeClr val="bg1"/>
+                    </a:solidFill>
+                  </a:tcPr>
+                </a:tc>
+                <a:extLst>
+                  <a:ext uri="{0D108BD9-81ED-4DB2-BD59-A6C34878D82A}">
+                    <a16:rowId xmlns:a16="http://schemas.microsoft.com/office/drawing/2014/main" val="1835143794"/>
+                  </a:ext>
+                </a:extLst>
+              </a:tr>
+              <a:tr h="0">
+                <a:tc>
+                  <a:txBody>
+                    <a:bodyPr/>
+                    <a:lstStyle/>
+                    <a:p>
+                      <a:r>
+                        <a:rPr lang="de-DE" sz="1100" dirty="0"/>
+                        <a:t>Kooperativ</a:t>
+                      </a:r>
+                    </a:p>
+                  </a:txBody>
+                  <a:tcPr>
+                    <a:lnL w="12700" cap="flat" cmpd="sng" algn="ctr">
+                      <a:solidFill>
+                        <a:schemeClr val="tx1"/>
+                      </a:solidFill>
+                      <a:prstDash val="solid"/>
+                      <a:round/>
+                      <a:headEnd type="none" w="med" len="med"/>
+                      <a:tailEnd type="none" w="med" len="med"/>
+                    </a:lnL>
+                    <a:lnR w="12700" cap="flat" cmpd="sng" algn="ctr">
+                      <a:solidFill>
+                        <a:schemeClr val="tx1"/>
+                      </a:solidFill>
+                      <a:prstDash val="solid"/>
+                      <a:round/>
+                      <a:headEnd type="none" w="med" len="med"/>
+                      <a:tailEnd type="none" w="med" len="med"/>
+                    </a:lnR>
+                    <a:lnT w="12700" cap="flat" cmpd="sng" algn="ctr">
+                      <a:solidFill>
+                        <a:schemeClr val="tx1"/>
+                      </a:solidFill>
+                      <a:prstDash val="solid"/>
+                      <a:round/>
+                      <a:headEnd type="none" w="med" len="med"/>
+                      <a:tailEnd type="none" w="med" len="med"/>
+                    </a:lnT>
+                    <a:lnB w="12700" cap="flat" cmpd="sng" algn="ctr">
+                      <a:solidFill>
+                        <a:schemeClr val="tx1"/>
+                      </a:solidFill>
+                      <a:prstDash val="solid"/>
+                      <a:round/>
+                      <a:headEnd type="none" w="med" len="med"/>
+                      <a:tailEnd type="none" w="med" len="med"/>
+                    </a:lnB>
+                    <a:solidFill>
+                      <a:schemeClr val="bg1"/>
+                    </a:solidFill>
+                  </a:tcPr>
+                </a:tc>
+                <a:tc>
+                  <a:txBody>
+                    <a:bodyPr/>
+                    <a:lstStyle/>
+                    <a:p>
+                      <a:r>
+                        <a:rPr lang="de-DE" sz="1100" dirty="0"/>
+                        <a:t>Mische alle </a:t>
+                      </a:r>
+                      <a:r>
+                        <a:rPr lang="de-DE" sz="1100" b="1" dirty="0"/>
+                        <a:t>Maßnahmenkarten</a:t>
+                      </a:r>
+                      <a:r>
+                        <a:rPr lang="de-DE" sz="1100" dirty="0"/>
+                        <a:t> zu einem Stapel zusammen</a:t>
+                      </a:r>
+                    </a:p>
+                  </a:txBody>
+                  <a:tcPr>
+                    <a:lnL w="12700" cap="flat" cmpd="sng" algn="ctr">
+                      <a:solidFill>
+                        <a:schemeClr val="tx1"/>
+                      </a:solidFill>
+                      <a:prstDash val="solid"/>
+                      <a:round/>
+                      <a:headEnd type="none" w="med" len="med"/>
+                      <a:tailEnd type="none" w="med" len="med"/>
+                    </a:lnL>
+                    <a:lnR w="12700" cap="flat" cmpd="sng" algn="ctr">
+                      <a:solidFill>
+                        <a:schemeClr val="tx1"/>
+                      </a:solidFill>
+                      <a:prstDash val="solid"/>
+                      <a:round/>
+                      <a:headEnd type="none" w="med" len="med"/>
+                      <a:tailEnd type="none" w="med" len="med"/>
+                    </a:lnR>
+                    <a:lnT w="12700" cap="flat" cmpd="sng" algn="ctr">
+                      <a:solidFill>
+                        <a:schemeClr val="tx1"/>
+                      </a:solidFill>
+                      <a:prstDash val="solid"/>
+                      <a:round/>
+                      <a:headEnd type="none" w="med" len="med"/>
+                      <a:tailEnd type="none" w="med" len="med"/>
+                    </a:lnT>
+                    <a:lnB w="12700" cap="flat" cmpd="sng" algn="ctr">
+                      <a:solidFill>
+                        <a:schemeClr val="tx1"/>
+                      </a:solidFill>
+                      <a:prstDash val="solid"/>
+                      <a:round/>
+                      <a:headEnd type="none" w="med" len="med"/>
+                      <a:tailEnd type="none" w="med" len="med"/>
+                    </a:lnB>
+                    <a:solidFill>
+                      <a:schemeClr val="bg1"/>
+                    </a:solidFill>
+                  </a:tcPr>
+                </a:tc>
+                <a:extLst>
+                  <a:ext uri="{0D108BD9-81ED-4DB2-BD59-A6C34878D82A}">
+                    <a16:rowId xmlns:a16="http://schemas.microsoft.com/office/drawing/2014/main" val="3690778960"/>
+                  </a:ext>
+                </a:extLst>
+              </a:tr>
+              <a:tr h="0">
+                <a:tc>
+                  <a:txBody>
+                    <a:bodyPr/>
+                    <a:lstStyle/>
+                    <a:p>
+                      <a:r>
+                        <a:rPr lang="de-DE" sz="1100" dirty="0"/>
+                        <a:t>Experte</a:t>
+                      </a:r>
+                    </a:p>
+                  </a:txBody>
+                  <a:tcPr>
+                    <a:lnL w="12700" cap="flat" cmpd="sng" algn="ctr">
+                      <a:solidFill>
+                        <a:schemeClr val="tx1"/>
+                      </a:solidFill>
+                      <a:prstDash val="solid"/>
+                      <a:round/>
+                      <a:headEnd type="none" w="med" len="med"/>
+                      <a:tailEnd type="none" w="med" len="med"/>
+                    </a:lnL>
+                    <a:lnR w="12700" cap="flat" cmpd="sng" algn="ctr">
+                      <a:solidFill>
+                        <a:schemeClr val="tx1"/>
+                      </a:solidFill>
+                      <a:prstDash val="solid"/>
+                      <a:round/>
+                      <a:headEnd type="none" w="med" len="med"/>
+                      <a:tailEnd type="none" w="med" len="med"/>
+                    </a:lnR>
+                    <a:lnT w="12700" cap="flat" cmpd="sng" algn="ctr">
+                      <a:solidFill>
+                        <a:schemeClr val="tx1"/>
+                      </a:solidFill>
+                      <a:prstDash val="solid"/>
+                      <a:round/>
+                      <a:headEnd type="none" w="med" len="med"/>
+                      <a:tailEnd type="none" w="med" len="med"/>
+                    </a:lnT>
+                    <a:lnB w="12700" cap="flat" cmpd="sng" algn="ctr">
+                      <a:solidFill>
+                        <a:schemeClr val="tx1"/>
+                      </a:solidFill>
+                      <a:prstDash val="solid"/>
+                      <a:round/>
+                      <a:headEnd type="none" w="med" len="med"/>
+                      <a:tailEnd type="none" w="med" len="med"/>
+                    </a:lnB>
+                    <a:solidFill>
+                      <a:schemeClr val="bg1"/>
+                    </a:solidFill>
+                  </a:tcPr>
+                </a:tc>
+                <a:tc>
+                  <a:txBody>
+                    <a:bodyPr/>
+                    <a:lstStyle/>
+                    <a:p>
+                      <a:r>
+                        <a:rPr lang="de-DE" sz="1100" dirty="0"/>
+                        <a:t>Sortiere die </a:t>
+                      </a:r>
+                      <a:r>
+                        <a:rPr lang="de-DE" sz="1100" b="1" dirty="0"/>
+                        <a:t>Maßnahmenkarten</a:t>
+                      </a:r>
+                      <a:r>
+                        <a:rPr lang="de-DE" sz="1100" dirty="0"/>
+                        <a:t> nach ihren Kategorien, mische die Stapel und lege sie bereit</a:t>
+                      </a:r>
+                    </a:p>
+                  </a:txBody>
+                  <a:tcPr>
+                    <a:lnL w="12700" cap="flat" cmpd="sng" algn="ctr">
+                      <a:solidFill>
+                        <a:schemeClr val="tx1"/>
+                      </a:solidFill>
+                      <a:prstDash val="solid"/>
+                      <a:round/>
+                      <a:headEnd type="none" w="med" len="med"/>
+                      <a:tailEnd type="none" w="med" len="med"/>
+                    </a:lnL>
+                    <a:lnR w="12700" cap="flat" cmpd="sng" algn="ctr">
+                      <a:solidFill>
+                        <a:schemeClr val="tx1"/>
+                      </a:solidFill>
+                      <a:prstDash val="solid"/>
+                      <a:round/>
+                      <a:headEnd type="none" w="med" len="med"/>
+                      <a:tailEnd type="none" w="med" len="med"/>
+                    </a:lnR>
+                    <a:lnT w="12700" cap="flat" cmpd="sng" algn="ctr">
+                      <a:solidFill>
+                        <a:schemeClr val="tx1"/>
+                      </a:solidFill>
+                      <a:prstDash val="solid"/>
+                      <a:round/>
+                      <a:headEnd type="none" w="med" len="med"/>
+                      <a:tailEnd type="none" w="med" len="med"/>
+                    </a:lnT>
+                    <a:lnB w="12700" cap="flat" cmpd="sng" algn="ctr">
+                      <a:solidFill>
+                        <a:schemeClr val="tx1"/>
+                      </a:solidFill>
+                      <a:prstDash val="solid"/>
+                      <a:round/>
+                      <a:headEnd type="none" w="med" len="med"/>
+                      <a:tailEnd type="none" w="med" len="med"/>
+                    </a:lnB>
+                    <a:solidFill>
+                      <a:schemeClr val="bg1"/>
+                    </a:solidFill>
+                  </a:tcPr>
+                </a:tc>
+                <a:extLst>
+                  <a:ext uri="{0D108BD9-81ED-4DB2-BD59-A6C34878D82A}">
+                    <a16:rowId xmlns:a16="http://schemas.microsoft.com/office/drawing/2014/main" val="1312053512"/>
+                  </a:ext>
+                </a:extLst>
+              </a:tr>
+            </a:tbl>
+          </a:graphicData>
+        </a:graphic>
+      </p:graphicFrame>
+      <p:graphicFrame>
+        <p:nvGraphicFramePr>
+          <p:cNvPr id="5" name="Table 4">
+            <a:extLst>
+              <a:ext uri="{FF2B5EF4-FFF2-40B4-BE49-F238E27FC236}">
+                <a16:creationId xmlns:a16="http://schemas.microsoft.com/office/drawing/2014/main" id="{D8C1EE85-FDE6-D8A3-E27A-D2B7CA485A2A}"/>
+              </a:ext>
+            </a:extLst>
+          </p:cNvPr>
+          <p:cNvGraphicFramePr>
+            <a:graphicFrameLocks noGrp="1"/>
+          </p:cNvGraphicFramePr>
+          <p:nvPr>
+            <p:extLst>
+              <p:ext uri="{D42A27DB-BD31-4B8C-83A1-F6EECF244321}">
+                <p14:modId xmlns:p14="http://schemas.microsoft.com/office/powerpoint/2010/main" val="3688974549"/>
+              </p:ext>
+            </p:extLst>
+          </p:nvPr>
+        </p:nvGraphicFramePr>
+        <p:xfrm>
+          <a:off x="-5029066" y="6740894"/>
+          <a:ext cx="5143366" cy="944880"/>
+        </p:xfrm>
+        <a:graphic>
+          <a:graphicData uri="http://schemas.openxmlformats.org/drawingml/2006/table">
+            <a:tbl>
+              <a:tblPr>
+                <a:tableStyleId>{5C22544A-7EE6-4342-B048-85BDC9FD1C3A}</a:tableStyleId>
+              </a:tblPr>
+              <a:tblGrid>
+                <a:gridCol w="965066">
+                  <a:extLst>
+                    <a:ext uri="{9D8B030D-6E8A-4147-A177-3AD203B41FA5}">
+                      <a16:colId xmlns:a16="http://schemas.microsoft.com/office/drawing/2014/main" val="605022111"/>
+                    </a:ext>
+                  </a:extLst>
+                </a:gridCol>
+                <a:gridCol w="4178300">
+                  <a:extLst>
+                    <a:ext uri="{9D8B030D-6E8A-4147-A177-3AD203B41FA5}">
+                      <a16:colId xmlns:a16="http://schemas.microsoft.com/office/drawing/2014/main" val="3735776512"/>
+                    </a:ext>
+                  </a:extLst>
+                </a:gridCol>
+              </a:tblGrid>
+              <a:tr h="0">
+                <a:tc>
+                  <a:txBody>
+                    <a:bodyPr/>
+                    <a:lstStyle/>
+                    <a:p>
+                      <a:r>
+                        <a:rPr lang="de-DE" sz="1100" dirty="0"/>
+                        <a:t>Kreativ</a:t>
+                      </a:r>
+                    </a:p>
+                  </a:txBody>
+                  <a:tcPr>
+                    <a:lnL w="12700" cap="flat" cmpd="sng" algn="ctr">
+                      <a:solidFill>
+                        <a:schemeClr val="tx1"/>
+                      </a:solidFill>
+                      <a:prstDash val="solid"/>
+                      <a:round/>
+                      <a:headEnd type="none" w="med" len="med"/>
+                      <a:tailEnd type="none" w="med" len="med"/>
+                    </a:lnL>
+                    <a:lnR w="12700" cap="flat" cmpd="sng" algn="ctr">
+                      <a:solidFill>
+                        <a:schemeClr val="tx1"/>
+                      </a:solidFill>
+                      <a:prstDash val="solid"/>
+                      <a:round/>
+                      <a:headEnd type="none" w="med" len="med"/>
+                      <a:tailEnd type="none" w="med" len="med"/>
+                    </a:lnR>
+                    <a:lnT w="12700" cap="flat" cmpd="sng" algn="ctr">
+                      <a:solidFill>
+                        <a:schemeClr val="tx1"/>
+                      </a:solidFill>
+                      <a:prstDash val="solid"/>
+                      <a:round/>
+                      <a:headEnd type="none" w="med" len="med"/>
+                      <a:tailEnd type="none" w="med" len="med"/>
+                    </a:lnT>
+                    <a:lnB w="12700" cap="flat" cmpd="sng" algn="ctr">
+                      <a:solidFill>
+                        <a:schemeClr val="tx1"/>
+                      </a:solidFill>
+                      <a:prstDash val="solid"/>
+                      <a:round/>
+                      <a:headEnd type="none" w="med" len="med"/>
+                      <a:tailEnd type="none" w="med" len="med"/>
+                    </a:lnB>
+                    <a:solidFill>
+                      <a:schemeClr val="bg1"/>
+                    </a:solidFill>
+                  </a:tcPr>
+                </a:tc>
+                <a:tc>
+                  <a:txBody>
+                    <a:bodyPr/>
+                    <a:lstStyle/>
+                    <a:p>
+                      <a:r>
+                        <a:rPr lang="de-DE" sz="1100" dirty="0"/>
+                        <a:t>Alle Maßnahmenkarten stehen zur Verfügung. </a:t>
+                      </a:r>
+                    </a:p>
+                  </a:txBody>
+                  <a:tcPr>
+                    <a:lnL w="12700" cap="flat" cmpd="sng" algn="ctr">
+                      <a:solidFill>
+                        <a:schemeClr val="tx1"/>
+                      </a:solidFill>
+                      <a:prstDash val="solid"/>
+                      <a:round/>
+                      <a:headEnd type="none" w="med" len="med"/>
+                      <a:tailEnd type="none" w="med" len="med"/>
+                    </a:lnL>
+                    <a:lnR w="12700" cap="flat" cmpd="sng" algn="ctr">
+                      <a:solidFill>
+                        <a:schemeClr val="tx1"/>
+                      </a:solidFill>
+                      <a:prstDash val="solid"/>
+                      <a:round/>
+                      <a:headEnd type="none" w="med" len="med"/>
+                      <a:tailEnd type="none" w="med" len="med"/>
+                    </a:lnR>
+                    <a:lnT w="12700" cap="flat" cmpd="sng" algn="ctr">
+                      <a:solidFill>
+                        <a:schemeClr val="tx1"/>
+                      </a:solidFill>
+                      <a:prstDash val="solid"/>
+                      <a:round/>
+                      <a:headEnd type="none" w="med" len="med"/>
+                      <a:tailEnd type="none" w="med" len="med"/>
+                    </a:lnT>
+                    <a:lnB w="12700" cap="flat" cmpd="sng" algn="ctr">
+                      <a:solidFill>
+                        <a:schemeClr val="tx1"/>
+                      </a:solidFill>
+                      <a:prstDash val="solid"/>
+                      <a:round/>
+                      <a:headEnd type="none" w="med" len="med"/>
+                      <a:tailEnd type="none" w="med" len="med"/>
+                    </a:lnB>
+                    <a:solidFill>
+                      <a:schemeClr val="bg1"/>
+                    </a:solidFill>
+                  </a:tcPr>
+                </a:tc>
+                <a:extLst>
+                  <a:ext uri="{0D108BD9-81ED-4DB2-BD59-A6C34878D82A}">
+                    <a16:rowId xmlns:a16="http://schemas.microsoft.com/office/drawing/2014/main" val="1835143794"/>
+                  </a:ext>
+                </a:extLst>
+              </a:tr>
+              <a:tr h="0">
+                <a:tc>
+                  <a:txBody>
+                    <a:bodyPr/>
+                    <a:lstStyle/>
+                    <a:p>
+                      <a:r>
+                        <a:rPr lang="de-DE" sz="1100" dirty="0"/>
+                        <a:t>Kooperativ</a:t>
+                      </a:r>
+                    </a:p>
+                  </a:txBody>
+                  <a:tcPr>
+                    <a:lnL w="12700" cap="flat" cmpd="sng" algn="ctr">
+                      <a:solidFill>
+                        <a:schemeClr val="tx1"/>
+                      </a:solidFill>
+                      <a:prstDash val="solid"/>
+                      <a:round/>
+                      <a:headEnd type="none" w="med" len="med"/>
+                      <a:tailEnd type="none" w="med" len="med"/>
+                    </a:lnL>
+                    <a:lnR w="12700" cap="flat" cmpd="sng" algn="ctr">
+                      <a:solidFill>
+                        <a:schemeClr val="tx1"/>
+                      </a:solidFill>
+                      <a:prstDash val="solid"/>
+                      <a:round/>
+                      <a:headEnd type="none" w="med" len="med"/>
+                      <a:tailEnd type="none" w="med" len="med"/>
+                    </a:lnR>
+                    <a:lnT w="12700" cap="flat" cmpd="sng" algn="ctr">
+                      <a:solidFill>
+                        <a:schemeClr val="tx1"/>
+                      </a:solidFill>
+                      <a:prstDash val="solid"/>
+                      <a:round/>
+                      <a:headEnd type="none" w="med" len="med"/>
+                      <a:tailEnd type="none" w="med" len="med"/>
+                    </a:lnT>
+                    <a:lnB w="12700" cap="flat" cmpd="sng" algn="ctr">
+                      <a:solidFill>
+                        <a:schemeClr val="tx1"/>
+                      </a:solidFill>
+                      <a:prstDash val="solid"/>
+                      <a:round/>
+                      <a:headEnd type="none" w="med" len="med"/>
+                      <a:tailEnd type="none" w="med" len="med"/>
+                    </a:lnB>
+                    <a:solidFill>
+                      <a:schemeClr val="bg1"/>
+                    </a:solidFill>
+                  </a:tcPr>
+                </a:tc>
+                <a:tc>
+                  <a:txBody>
+                    <a:bodyPr/>
+                    <a:lstStyle/>
+                    <a:p>
+                      <a:r>
+                        <a:rPr lang="de-DE" sz="1100" dirty="0"/>
+                        <a:t>Mische alle </a:t>
+                      </a:r>
+                      <a:r>
+                        <a:rPr lang="de-DE" sz="1100" b="1" dirty="0"/>
+                        <a:t>Maßnahmenkarten</a:t>
+                      </a:r>
+                      <a:r>
+                        <a:rPr lang="de-DE" sz="1100" dirty="0"/>
+                        <a:t> zu einem Stapel zusammen</a:t>
+                      </a:r>
+                    </a:p>
+                  </a:txBody>
+                  <a:tcPr>
+                    <a:lnL w="12700" cap="flat" cmpd="sng" algn="ctr">
+                      <a:solidFill>
+                        <a:schemeClr val="tx1"/>
+                      </a:solidFill>
+                      <a:prstDash val="solid"/>
+                      <a:round/>
+                      <a:headEnd type="none" w="med" len="med"/>
+                      <a:tailEnd type="none" w="med" len="med"/>
+                    </a:lnL>
+                    <a:lnR w="12700" cap="flat" cmpd="sng" algn="ctr">
+                      <a:solidFill>
+                        <a:schemeClr val="tx1"/>
+                      </a:solidFill>
+                      <a:prstDash val="solid"/>
+                      <a:round/>
+                      <a:headEnd type="none" w="med" len="med"/>
+                      <a:tailEnd type="none" w="med" len="med"/>
+                    </a:lnR>
+                    <a:lnT w="12700" cap="flat" cmpd="sng" algn="ctr">
+                      <a:solidFill>
+                        <a:schemeClr val="tx1"/>
+                      </a:solidFill>
+                      <a:prstDash val="solid"/>
+                      <a:round/>
+                      <a:headEnd type="none" w="med" len="med"/>
+                      <a:tailEnd type="none" w="med" len="med"/>
+                    </a:lnT>
+                    <a:lnB w="12700" cap="flat" cmpd="sng" algn="ctr">
+                      <a:solidFill>
+                        <a:schemeClr val="tx1"/>
+                      </a:solidFill>
+                      <a:prstDash val="solid"/>
+                      <a:round/>
+                      <a:headEnd type="none" w="med" len="med"/>
+                      <a:tailEnd type="none" w="med" len="med"/>
+                    </a:lnB>
+                    <a:solidFill>
+                      <a:schemeClr val="bg1"/>
+                    </a:solidFill>
+                  </a:tcPr>
+                </a:tc>
+                <a:extLst>
+                  <a:ext uri="{0D108BD9-81ED-4DB2-BD59-A6C34878D82A}">
+                    <a16:rowId xmlns:a16="http://schemas.microsoft.com/office/drawing/2014/main" val="3690778960"/>
+                  </a:ext>
+                </a:extLst>
+              </a:tr>
+              <a:tr h="0">
+                <a:tc>
+                  <a:txBody>
+                    <a:bodyPr/>
+                    <a:lstStyle/>
+                    <a:p>
+                      <a:r>
+                        <a:rPr lang="de-DE" sz="1100" dirty="0"/>
+                        <a:t>Experte</a:t>
+                      </a:r>
+                    </a:p>
+                  </a:txBody>
+                  <a:tcPr>
+                    <a:lnL w="12700" cap="flat" cmpd="sng" algn="ctr">
+                      <a:solidFill>
+                        <a:schemeClr val="tx1"/>
+                      </a:solidFill>
+                      <a:prstDash val="solid"/>
+                      <a:round/>
+                      <a:headEnd type="none" w="med" len="med"/>
+                      <a:tailEnd type="none" w="med" len="med"/>
+                    </a:lnL>
+                    <a:lnR w="12700" cap="flat" cmpd="sng" algn="ctr">
+                      <a:solidFill>
+                        <a:schemeClr val="tx1"/>
+                      </a:solidFill>
+                      <a:prstDash val="solid"/>
+                      <a:round/>
+                      <a:headEnd type="none" w="med" len="med"/>
+                      <a:tailEnd type="none" w="med" len="med"/>
+                    </a:lnR>
+                    <a:lnT w="12700" cap="flat" cmpd="sng" algn="ctr">
+                      <a:solidFill>
+                        <a:schemeClr val="tx1"/>
+                      </a:solidFill>
+                      <a:prstDash val="solid"/>
+                      <a:round/>
+                      <a:headEnd type="none" w="med" len="med"/>
+                      <a:tailEnd type="none" w="med" len="med"/>
+                    </a:lnT>
+                    <a:lnB w="12700" cap="flat" cmpd="sng" algn="ctr">
+                      <a:solidFill>
+                        <a:schemeClr val="tx1"/>
+                      </a:solidFill>
+                      <a:prstDash val="solid"/>
+                      <a:round/>
+                      <a:headEnd type="none" w="med" len="med"/>
+                      <a:tailEnd type="none" w="med" len="med"/>
+                    </a:lnB>
+                    <a:solidFill>
+                      <a:schemeClr val="bg1"/>
+                    </a:solidFill>
+                  </a:tcPr>
+                </a:tc>
+                <a:tc>
+                  <a:txBody>
+                    <a:bodyPr/>
+                    <a:lstStyle/>
+                    <a:p>
+                      <a:r>
+                        <a:rPr lang="de-DE" sz="1100" dirty="0"/>
+                        <a:t>Sortiere die </a:t>
+                      </a:r>
+                      <a:r>
+                        <a:rPr lang="de-DE" sz="1100" b="1" dirty="0"/>
+                        <a:t>Maßnahmenkarten</a:t>
+                      </a:r>
+                      <a:r>
+                        <a:rPr lang="de-DE" sz="1100" dirty="0"/>
+                        <a:t> nach ihren Kategorien, mische die Stapel und lege sie bereit</a:t>
+                      </a:r>
+                    </a:p>
+                  </a:txBody>
+                  <a:tcPr>
+                    <a:lnL w="12700" cap="flat" cmpd="sng" algn="ctr">
+                      <a:solidFill>
+                        <a:schemeClr val="tx1"/>
+                      </a:solidFill>
+                      <a:prstDash val="solid"/>
+                      <a:round/>
+                      <a:headEnd type="none" w="med" len="med"/>
+                      <a:tailEnd type="none" w="med" len="med"/>
+                    </a:lnL>
+                    <a:lnR w="12700" cap="flat" cmpd="sng" algn="ctr">
+                      <a:solidFill>
+                        <a:schemeClr val="tx1"/>
+                      </a:solidFill>
+                      <a:prstDash val="solid"/>
+                      <a:round/>
+                      <a:headEnd type="none" w="med" len="med"/>
+                      <a:tailEnd type="none" w="med" len="med"/>
+                    </a:lnR>
+                    <a:lnT w="12700" cap="flat" cmpd="sng" algn="ctr">
+                      <a:solidFill>
+                        <a:schemeClr val="tx1"/>
+                      </a:solidFill>
+                      <a:prstDash val="solid"/>
+                      <a:round/>
+                      <a:headEnd type="none" w="med" len="med"/>
+                      <a:tailEnd type="none" w="med" len="med"/>
+                    </a:lnT>
+                    <a:lnB w="12700" cap="flat" cmpd="sng" algn="ctr">
+                      <a:solidFill>
+                        <a:schemeClr val="tx1"/>
+                      </a:solidFill>
+                      <a:prstDash val="solid"/>
+                      <a:round/>
+                      <a:headEnd type="none" w="med" len="med"/>
+                      <a:tailEnd type="none" w="med" len="med"/>
+                    </a:lnB>
+                    <a:solidFill>
+                      <a:schemeClr val="bg1"/>
+                    </a:solidFill>
+                  </a:tcPr>
+                </a:tc>
+                <a:extLst>
+                  <a:ext uri="{0D108BD9-81ED-4DB2-BD59-A6C34878D82A}">
+                    <a16:rowId xmlns:a16="http://schemas.microsoft.com/office/drawing/2014/main" val="1312053512"/>
+                  </a:ext>
+                </a:extLst>
+              </a:tr>
+            </a:tbl>
+          </a:graphicData>
+        </a:graphic>
+      </p:graphicFrame>
     </p:spTree>
     <p:extLst>
       <p:ext uri="{BB962C8B-B14F-4D97-AF65-F5344CB8AC3E}">
@@ -3937,13 +4990,8 @@
             </a:r>
             <a:r>
               <a:rPr lang="de-DE" sz="1100" dirty="0"/>
-              <a:t> </a:t>
-            </a:r>
-            <a:r>
-              <a:rPr lang="de-DE" sz="1100"/>
-              <a:t>ergeben sich 	Emissionen</a:t>
-            </a:r>
-            <a:endParaRPr lang="de-DE" sz="1100" dirty="0"/>
+              <a:t> ergeben sich 	Emissionen</a:t>
+            </a:r>
           </a:p>
           <a:p>
             <a:r>
